--- a/docs/SDLC-pipeline-walkthrough.pptx
+++ b/docs/SDLC-pipeline-walkthrough.pptx
@@ -3276,7 +3276,7 @@
                 </a:solidFill>
                 <a:latin typeface="Segoe UI"/>
               </a:rPr>
-              <a:t>When ceremony is overkill</a:t>
+              <a:t>Stage 8: from theatre to evidence</a:t>
             </a:r>
           </a:p>
         </p:txBody>
@@ -3311,7 +3311,7 @@
                 </a:solidFill>
                 <a:latin typeface="Segoe UI"/>
               </a:rPr>
-              <a:t>Introducing /lite-build — the 3-stage variant.</a:t>
+              <a:t>The biggest gap we caught — and the fix that's now baked into the pipeline.</a:t>
             </a:r>
           </a:p>
         </p:txBody>
@@ -3415,7 +3415,7 @@
                 </a:solidFill>
                 <a:latin typeface="Segoe UI"/>
               </a:rPr>
-              <a:t>/lite-build at a glance</a:t>
+              <a:t>The problem we caught in retro</a:t>
             </a:r>
           </a:p>
         </p:txBody>
@@ -3454,7 +3454,7 @@
                 </a:solidFill>
                 <a:latin typeface="Segoe UI"/>
               </a:rPr>
-              <a:t>•  Three stages: Spec -&gt; Build -&gt; Verify.</a:t>
+              <a:t>•  Stage 8 originally accepted any 'evidence artifact' that existed and was non-empty.</a:t>
             </a:r>
           </a:p>
           <a:p>
@@ -3470,7 +3470,7 @@
                 </a:solidFill>
                 <a:latin typeface="Segoe UI"/>
               </a:rPr>
-              <a:t>•  One markdown per stage. No JSON, no separate UX flows, no traceability matrix.</a:t>
+              <a:t>•  On a real run, that loophole let 101 'PASS' rows all point at the same Vitest log.</a:t>
             </a:r>
           </a:p>
           <a:p>
@@ -3486,7 +3486,7 @@
                 </a:solidFill>
                 <a:latin typeface="Segoe UI"/>
               </a:rPr>
-              <a:t>•  Single combined verifier (~150 lines of Python).</a:t>
+              <a:t>•  Coverage in shape, not in substance. The deployment gate flipped APPROVED with zero browser pixels captured.</a:t>
             </a:r>
           </a:p>
           <a:p>
@@ -3502,7 +3502,7 @@
                 </a:solidFill>
                 <a:latin typeface="Segoe UI"/>
               </a:rPr>
-              <a:t>•  Kept: anti-hallucination on assumptions, FR-id traceability into tests, build + tests must pass.</a:t>
+              <a:t>•  Self-graded structure, no independent proof the UI works.</a:t>
             </a:r>
           </a:p>
           <a:p>
@@ -3518,58 +3518,7 @@
                 </a:solidFill>
                 <a:latin typeface="Segoe UI"/>
               </a:rPr>
-              <a:t>•  Dropped: stories, tasks, drift hashes, dimension-tagged review, separate UAT.</a:t>
-            </a:r>
-          </a:p>
-          <a:p>
-            <a:pPr algn="l">
-              <a:spcAft>
-                <a:spcPts val="800"/>
-              </a:spcAft>
-            </a:pPr>
-            <a:r>
-              <a:rPr sz="1800">
-                <a:solidFill>
-                  <a:srgbClr val="E6EDF3"/>
-                </a:solidFill>
-                <a:latin typeface="Segoe UI"/>
-              </a:rPr>
-              <a:t>•  Use it when: small feature, prototype, focused enhancement.</a:t>
-            </a:r>
-          </a:p>
-        </p:txBody>
-      </p:sp>
-      <p:sp>
-        <p:nvSpPr>
-          <p:cNvPr id="5" name="TextBox 4"/>
-          <p:cNvSpPr txBox="1"/>
-          <p:nvPr/>
-        </p:nvSpPr>
-        <p:spPr>
-          <a:xfrm>
-            <a:off x="548640" y="6446520"/>
-            <a:ext cx="10972800" cy="274320"/>
-          </a:xfrm>
-          <a:prstGeom prst="rect">
-            <a:avLst/>
-          </a:prstGeom>
-          <a:noFill/>
-        </p:spPr>
-        <p:txBody>
-          <a:bodyPr wrap="square">
-            <a:spAutoFit/>
-          </a:bodyPr>
-          <a:lstStyle/>
-          <a:p>
-            <a:pPr algn="l"/>
-            <a:r>
-              <a:rPr sz="1000" b="0">
-                <a:solidFill>
-                  <a:srgbClr val="9AA6B2"/>
-                </a:solidFill>
-                <a:latin typeface="Segoe UI"/>
-              </a:rPr>
-              <a:t>.agents/skills-lite/  +  /lite-build slash command</a:t>
+              <a:t>•  If we'd shipped on that signal, a regression in any UI flow would slip past every gate.</a:t>
             </a:r>
           </a:p>
         </p:txBody>
@@ -3673,728 +3622,21 @@
                 </a:solidFill>
                 <a:latin typeface="Segoe UI"/>
               </a:rPr>
-              <a:t>Lite vs full — Snake rebuilt under both</a:t>
-            </a:r>
-          </a:p>
-        </p:txBody>
-      </p:sp>
-      <p:graphicFrame>
-        <p:nvGraphicFramePr>
-          <p:cNvPr id="4" name="Table 3"/>
-          <p:cNvGraphicFramePr>
-            <a:graphicFrameLocks noGrp="1"/>
-          </p:cNvGraphicFramePr>
-          <p:nvPr/>
-        </p:nvGraphicFramePr>
-        <p:xfrm>
-          <a:off x="548640" y="1554480"/>
-          <a:ext cx="11064240" cy="4572000"/>
-        </p:xfrm>
-        <a:graphic>
-          <a:graphicData uri="http://schemas.openxmlformats.org/drawingml/2006/table">
-            <a:tbl>
-              <a:tblPr firstRow="1" bandRow="1">
-                <a:tableStyleId>{5C22544A-7EE6-4342-B048-85BDC9FD1C3A}</a:tableStyleId>
-              </a:tblPr>
-              <a:tblGrid>
-                <a:gridCol w="3688080"/>
-                <a:gridCol w="3688080"/>
-                <a:gridCol w="3688080"/>
-              </a:tblGrid>
-              <a:tr h="457200">
-                <a:tc>
-                  <a:txBody>
-                    <a:bodyPr/>
-                    <a:lstStyle/>
-                    <a:p>
-                      <a:r>
-                        <a:rPr b="1" sz="1400">
-                          <a:solidFill>
-                            <a:srgbClr val="43E8B8"/>
-                          </a:solidFill>
-                          <a:latin typeface="Segoe UI"/>
-                        </a:rPr>
-                        <a:t>Metric</a:t>
-                      </a:r>
-                    </a:p>
-                  </a:txBody>
-                  <a:tcPr>
-                    <a:solidFill>
-                      <a:srgbClr val="11161F"/>
-                    </a:solidFill>
-                  </a:tcPr>
-                </a:tc>
-                <a:tc>
-                  <a:txBody>
-                    <a:bodyPr/>
-                    <a:lstStyle/>
-                    <a:p>
-                      <a:r>
-                        <a:rPr b="1" sz="1400">
-                          <a:solidFill>
-                            <a:srgbClr val="43E8B8"/>
-                          </a:solidFill>
-                          <a:latin typeface="Segoe UI"/>
-                        </a:rPr>
-                        <a:t>9-stage</a:t>
-                      </a:r>
-                    </a:p>
-                  </a:txBody>
-                  <a:tcPr>
-                    <a:solidFill>
-                      <a:srgbClr val="11161F"/>
-                    </a:solidFill>
-                  </a:tcPr>
-                </a:tc>
-                <a:tc>
-                  <a:txBody>
-                    <a:bodyPr/>
-                    <a:lstStyle/>
-                    <a:p>
-                      <a:r>
-                        <a:rPr b="1" sz="1400">
-                          <a:solidFill>
-                            <a:srgbClr val="43E8B8"/>
-                          </a:solidFill>
-                          <a:latin typeface="Segoe UI"/>
-                        </a:rPr>
-                        <a:t>3-stage lite</a:t>
-                      </a:r>
-                    </a:p>
-                  </a:txBody>
-                  <a:tcPr>
-                    <a:solidFill>
-                      <a:srgbClr val="11161F"/>
-                    </a:solidFill>
-                  </a:tcPr>
-                </a:tc>
-              </a:tr>
-              <a:tr h="457200">
-                <a:tc>
-                  <a:txBody>
-                    <a:bodyPr/>
-                    <a:lstStyle/>
-                    <a:p>
-                      <a:r>
-                        <a:rPr sz="1300">
-                          <a:solidFill>
-                            <a:srgbClr val="E6EDF3"/>
-                          </a:solidFill>
-                          <a:latin typeface="Segoe UI"/>
-                        </a:rPr>
-                        <a:t>Stages</a:t>
-                      </a:r>
-                    </a:p>
-                  </a:txBody>
-                  <a:tcPr>
-                    <a:solidFill>
-                      <a:srgbClr val="0B0E14"/>
-                    </a:solidFill>
-                  </a:tcPr>
-                </a:tc>
-                <a:tc>
-                  <a:txBody>
-                    <a:bodyPr/>
-                    <a:lstStyle/>
-                    <a:p>
-                      <a:r>
-                        <a:rPr sz="1300">
-                          <a:solidFill>
-                            <a:srgbClr val="E6EDF3"/>
-                          </a:solidFill>
-                          <a:latin typeface="Segoe UI"/>
-                        </a:rPr>
-                        <a:t>8 (9 with deploy)</a:t>
-                      </a:r>
-                    </a:p>
-                  </a:txBody>
-                  <a:tcPr>
-                    <a:solidFill>
-                      <a:srgbClr val="0B0E14"/>
-                    </a:solidFill>
-                  </a:tcPr>
-                </a:tc>
-                <a:tc>
-                  <a:txBody>
-                    <a:bodyPr/>
-                    <a:lstStyle/>
-                    <a:p>
-                      <a:r>
-                        <a:rPr sz="1300">
-                          <a:solidFill>
-                            <a:srgbClr val="E6EDF3"/>
-                          </a:solidFill>
-                          <a:latin typeface="Segoe UI"/>
-                        </a:rPr>
-                        <a:t>3</a:t>
-                      </a:r>
-                    </a:p>
-                  </a:txBody>
-                  <a:tcPr>
-                    <a:solidFill>
-                      <a:srgbClr val="0B0E14"/>
-                    </a:solidFill>
-                  </a:tcPr>
-                </a:tc>
-              </a:tr>
-              <a:tr h="457200">
-                <a:tc>
-                  <a:txBody>
-                    <a:bodyPr/>
-                    <a:lstStyle/>
-                    <a:p>
-                      <a:r>
-                        <a:rPr sz="1300">
-                          <a:solidFill>
-                            <a:srgbClr val="E6EDF3"/>
-                          </a:solidFill>
-                          <a:latin typeface="Segoe UI"/>
-                        </a:rPr>
-                        <a:t>Skill files</a:t>
-                      </a:r>
-                    </a:p>
-                  </a:txBody>
-                  <a:tcPr>
-                    <a:solidFill>
-                      <a:srgbClr val="0B0E14"/>
-                    </a:solidFill>
-                  </a:tcPr>
-                </a:tc>
-                <a:tc>
-                  <a:txBody>
-                    <a:bodyPr/>
-                    <a:lstStyle/>
-                    <a:p>
-                      <a:r>
-                        <a:rPr sz="1300">
-                          <a:solidFill>
-                            <a:srgbClr val="E6EDF3"/>
-                          </a:solidFill>
-                          <a:latin typeface="Segoe UI"/>
-                        </a:rPr>
-                        <a:t>9 + ~12 prompts + verifiers</a:t>
-                      </a:r>
-                    </a:p>
-                  </a:txBody>
-                  <a:tcPr>
-                    <a:solidFill>
-                      <a:srgbClr val="0B0E14"/>
-                    </a:solidFill>
-                  </a:tcPr>
-                </a:tc>
-                <a:tc>
-                  <a:txBody>
-                    <a:bodyPr/>
-                    <a:lstStyle/>
-                    <a:p>
-                      <a:r>
-                        <a:rPr sz="1300">
-                          <a:solidFill>
-                            <a:srgbClr val="E6EDF3"/>
-                          </a:solidFill>
-                          <a:latin typeface="Segoe UI"/>
-                        </a:rPr>
-                        <a:t>4 + 1 verifier</a:t>
-                      </a:r>
-                    </a:p>
-                  </a:txBody>
-                  <a:tcPr>
-                    <a:solidFill>
-                      <a:srgbClr val="0B0E14"/>
-                    </a:solidFill>
-                  </a:tcPr>
-                </a:tc>
-              </a:tr>
-              <a:tr h="457200">
-                <a:tc>
-                  <a:txBody>
-                    <a:bodyPr/>
-                    <a:lstStyle/>
-                    <a:p>
-                      <a:r>
-                        <a:rPr sz="1300">
-                          <a:solidFill>
-                            <a:srgbClr val="E6EDF3"/>
-                          </a:solidFill>
-                          <a:latin typeface="Segoe UI"/>
-                        </a:rPr>
-                        <a:t>Pipeline artifacts</a:t>
-                      </a:r>
-                    </a:p>
-                  </a:txBody>
-                  <a:tcPr>
-                    <a:solidFill>
-                      <a:srgbClr val="0B0E14"/>
-                    </a:solidFill>
-                  </a:tcPr>
-                </a:tc>
-                <a:tc>
-                  <a:txBody>
-                    <a:bodyPr/>
-                    <a:lstStyle/>
-                    <a:p>
-                      <a:r>
-                        <a:rPr sz="1300">
-                          <a:solidFill>
-                            <a:srgbClr val="E6EDF3"/>
-                          </a:solidFill>
-                          <a:latin typeface="Segoe UI"/>
-                        </a:rPr>
-                        <a:t>17 JSON + Markdown</a:t>
-                      </a:r>
-                    </a:p>
-                  </a:txBody>
-                  <a:tcPr>
-                    <a:solidFill>
-                      <a:srgbClr val="0B0E14"/>
-                    </a:solidFill>
-                  </a:tcPr>
-                </a:tc>
-                <a:tc>
-                  <a:txBody>
-                    <a:bodyPr/>
-                    <a:lstStyle/>
-                    <a:p>
-                      <a:r>
-                        <a:rPr sz="1300">
-                          <a:solidFill>
-                            <a:srgbClr val="E6EDF3"/>
-                          </a:solidFill>
-                          <a:latin typeface="Segoe UI"/>
-                        </a:rPr>
-                        <a:t>3 files</a:t>
-                      </a:r>
-                    </a:p>
-                  </a:txBody>
-                  <a:tcPr>
-                    <a:solidFill>
-                      <a:srgbClr val="0B0E14"/>
-                    </a:solidFill>
-                  </a:tcPr>
-                </a:tc>
-              </a:tr>
-              <a:tr h="457200">
-                <a:tc>
-                  <a:txBody>
-                    <a:bodyPr/>
-                    <a:lstStyle/>
-                    <a:p>
-                      <a:r>
-                        <a:rPr sz="1300">
-                          <a:solidFill>
-                            <a:srgbClr val="E6EDF3"/>
-                          </a:solidFill>
-                          <a:latin typeface="Segoe UI"/>
-                        </a:rPr>
-                        <a:t>Source files</a:t>
-                      </a:r>
-                    </a:p>
-                  </a:txBody>
-                  <a:tcPr>
-                    <a:solidFill>
-                      <a:srgbClr val="0B0E14"/>
-                    </a:solidFill>
-                  </a:tcPr>
-                </a:tc>
-                <a:tc>
-                  <a:txBody>
-                    <a:bodyPr/>
-                    <a:lstStyle/>
-                    <a:p>
-                      <a:r>
-                        <a:rPr sz="1300">
-                          <a:solidFill>
-                            <a:srgbClr val="E6EDF3"/>
-                          </a:solidFill>
-                          <a:latin typeface="Segoe UI"/>
-                        </a:rPr>
-                        <a:t>21 TS + 1 CSS</a:t>
-                      </a:r>
-                    </a:p>
-                  </a:txBody>
-                  <a:tcPr>
-                    <a:solidFill>
-                      <a:srgbClr val="0B0E14"/>
-                    </a:solidFill>
-                  </a:tcPr>
-                </a:tc>
-                <a:tc>
-                  <a:txBody>
-                    <a:bodyPr/>
-                    <a:lstStyle/>
-                    <a:p>
-                      <a:r>
-                        <a:rPr sz="1300">
-                          <a:solidFill>
-                            <a:srgbClr val="E6EDF3"/>
-                          </a:solidFill>
-                          <a:latin typeface="Segoe UI"/>
-                        </a:rPr>
-                        <a:t>6 TS + 1 CSS</a:t>
-                      </a:r>
-                    </a:p>
-                  </a:txBody>
-                  <a:tcPr>
-                    <a:solidFill>
-                      <a:srgbClr val="0B0E14"/>
-                    </a:solidFill>
-                  </a:tcPr>
-                </a:tc>
-              </a:tr>
-              <a:tr h="457200">
-                <a:tc>
-                  <a:txBody>
-                    <a:bodyPr/>
-                    <a:lstStyle/>
-                    <a:p>
-                      <a:r>
-                        <a:rPr sz="1300">
-                          <a:solidFill>
-                            <a:srgbClr val="E6EDF3"/>
-                          </a:solidFill>
-                          <a:latin typeface="Segoe UI"/>
-                        </a:rPr>
-                        <a:t>Lines of source</a:t>
-                      </a:r>
-                    </a:p>
-                  </a:txBody>
-                  <a:tcPr>
-                    <a:solidFill>
-                      <a:srgbClr val="0B0E14"/>
-                    </a:solidFill>
-                  </a:tcPr>
-                </a:tc>
-                <a:tc>
-                  <a:txBody>
-                    <a:bodyPr/>
-                    <a:lstStyle/>
-                    <a:p>
-                      <a:r>
-                        <a:rPr sz="1300">
-                          <a:solidFill>
-                            <a:srgbClr val="E6EDF3"/>
-                          </a:solidFill>
-                          <a:latin typeface="Segoe UI"/>
-                        </a:rPr>
-                        <a:t>~5000</a:t>
-                      </a:r>
-                    </a:p>
-                  </a:txBody>
-                  <a:tcPr>
-                    <a:solidFill>
-                      <a:srgbClr val="0B0E14"/>
-                    </a:solidFill>
-                  </a:tcPr>
-                </a:tc>
-                <a:tc>
-                  <a:txBody>
-                    <a:bodyPr/>
-                    <a:lstStyle/>
-                    <a:p>
-                      <a:r>
-                        <a:rPr sz="1300">
-                          <a:solidFill>
-                            <a:srgbClr val="E6EDF3"/>
-                          </a:solidFill>
-                          <a:latin typeface="Segoe UI"/>
-                        </a:rPr>
-                        <a:t>~1500</a:t>
-                      </a:r>
-                    </a:p>
-                  </a:txBody>
-                  <a:tcPr>
-                    <a:solidFill>
-                      <a:srgbClr val="0B0E14"/>
-                    </a:solidFill>
-                  </a:tcPr>
-                </a:tc>
-              </a:tr>
-              <a:tr h="457200">
-                <a:tc>
-                  <a:txBody>
-                    <a:bodyPr/>
-                    <a:lstStyle/>
-                    <a:p>
-                      <a:r>
-                        <a:rPr sz="1300">
-                          <a:solidFill>
-                            <a:srgbClr val="E6EDF3"/>
-                          </a:solidFill>
-                          <a:latin typeface="Segoe UI"/>
-                        </a:rPr>
-                        <a:t>Tests</a:t>
-                      </a:r>
-                    </a:p>
-                  </a:txBody>
-                  <a:tcPr>
-                    <a:solidFill>
-                      <a:srgbClr val="0B0E14"/>
-                    </a:solidFill>
-                  </a:tcPr>
-                </a:tc>
-                <a:tc>
-                  <a:txBody>
-                    <a:bodyPr/>
-                    <a:lstStyle/>
-                    <a:p>
-                      <a:r>
-                        <a:rPr sz="1300">
-                          <a:solidFill>
-                            <a:srgbClr val="E6EDF3"/>
-                          </a:solidFill>
-                          <a:latin typeface="Segoe UI"/>
-                        </a:rPr>
-                        <a:t>112 (22 files)</a:t>
-                      </a:r>
-                    </a:p>
-                  </a:txBody>
-                  <a:tcPr>
-                    <a:solidFill>
-                      <a:srgbClr val="0B0E14"/>
-                    </a:solidFill>
-                  </a:tcPr>
-                </a:tc>
-                <a:tc>
-                  <a:txBody>
-                    <a:bodyPr/>
-                    <a:lstStyle/>
-                    <a:p>
-                      <a:r>
-                        <a:rPr sz="1300">
-                          <a:solidFill>
-                            <a:srgbClr val="E6EDF3"/>
-                          </a:solidFill>
-                          <a:latin typeface="Segoe UI"/>
-                        </a:rPr>
-                        <a:t>21 (4 files)</a:t>
-                      </a:r>
-                    </a:p>
-                  </a:txBody>
-                  <a:tcPr>
-                    <a:solidFill>
-                      <a:srgbClr val="0B0E14"/>
-                    </a:solidFill>
-                  </a:tcPr>
-                </a:tc>
-              </a:tr>
-              <a:tr h="457200">
-                <a:tc>
-                  <a:txBody>
-                    <a:bodyPr/>
-                    <a:lstStyle/>
-                    <a:p>
-                      <a:r>
-                        <a:rPr sz="1300">
-                          <a:solidFill>
-                            <a:srgbClr val="E6EDF3"/>
-                          </a:solidFill>
-                          <a:latin typeface="Segoe UI"/>
-                        </a:rPr>
-                        <a:t>Bundle (gzip)</a:t>
-                      </a:r>
-                    </a:p>
-                  </a:txBody>
-                  <a:tcPr>
-                    <a:solidFill>
-                      <a:srgbClr val="0B0E14"/>
-                    </a:solidFill>
-                  </a:tcPr>
-                </a:tc>
-                <a:tc>
-                  <a:txBody>
-                    <a:bodyPr/>
-                    <a:lstStyle/>
-                    <a:p>
-                      <a:r>
-                        <a:rPr sz="1300">
-                          <a:solidFill>
-                            <a:srgbClr val="E6EDF3"/>
-                          </a:solidFill>
-                          <a:latin typeface="Segoe UI"/>
-                        </a:rPr>
-                        <a:t>12.65 KB JS + 2 KB CSS</a:t>
-                      </a:r>
-                    </a:p>
-                  </a:txBody>
-                  <a:tcPr>
-                    <a:solidFill>
-                      <a:srgbClr val="0B0E14"/>
-                    </a:solidFill>
-                  </a:tcPr>
-                </a:tc>
-                <a:tc>
-                  <a:txBody>
-                    <a:bodyPr/>
-                    <a:lstStyle/>
-                    <a:p>
-                      <a:r>
-                        <a:rPr sz="1300">
-                          <a:solidFill>
-                            <a:srgbClr val="E6EDF3"/>
-                          </a:solidFill>
-                          <a:latin typeface="Segoe UI"/>
-                        </a:rPr>
-                        <a:t>8.41 KB JS + 1.43 KB CSS</a:t>
-                      </a:r>
-                    </a:p>
-                  </a:txBody>
-                  <a:tcPr>
-                    <a:solidFill>
-                      <a:srgbClr val="0B0E14"/>
-                    </a:solidFill>
-                  </a:tcPr>
-                </a:tc>
-              </a:tr>
-              <a:tr h="457200">
-                <a:tc>
-                  <a:txBody>
-                    <a:bodyPr/>
-                    <a:lstStyle/>
-                    <a:p>
-                      <a:r>
-                        <a:rPr sz="1300">
-                          <a:solidFill>
-                            <a:srgbClr val="E6EDF3"/>
-                          </a:solidFill>
-                          <a:latin typeface="Segoe UI"/>
-                        </a:rPr>
-                        <a:t>Wall time</a:t>
-                      </a:r>
-                    </a:p>
-                  </a:txBody>
-                  <a:tcPr>
-                    <a:solidFill>
-                      <a:srgbClr val="0B0E14"/>
-                    </a:solidFill>
-                  </a:tcPr>
-                </a:tc>
-                <a:tc>
-                  <a:txBody>
-                    <a:bodyPr/>
-                    <a:lstStyle/>
-                    <a:p>
-                      <a:r>
-                        <a:rPr sz="1300">
-                          <a:solidFill>
-                            <a:srgbClr val="E6EDF3"/>
-                          </a:solidFill>
-                          <a:latin typeface="Segoe UI"/>
-                        </a:rPr>
-                        <a:t>~hours</a:t>
-                      </a:r>
-                    </a:p>
-                  </a:txBody>
-                  <a:tcPr>
-                    <a:solidFill>
-                      <a:srgbClr val="0B0E14"/>
-                    </a:solidFill>
-                  </a:tcPr>
-                </a:tc>
-                <a:tc>
-                  <a:txBody>
-                    <a:bodyPr/>
-                    <a:lstStyle/>
-                    <a:p>
-                      <a:r>
-                        <a:rPr sz="1300">
-                          <a:solidFill>
-                            <a:srgbClr val="E6EDF3"/>
-                          </a:solidFill>
-                          <a:latin typeface="Segoe UI"/>
-                        </a:rPr>
-                        <a:t>~25 minutes</a:t>
-                      </a:r>
-                    </a:p>
-                  </a:txBody>
-                  <a:tcPr>
-                    <a:solidFill>
-                      <a:srgbClr val="0B0E14"/>
-                    </a:solidFill>
-                  </a:tcPr>
-                </a:tc>
-              </a:tr>
-              <a:tr h="457200">
-                <a:tc>
-                  <a:txBody>
-                    <a:bodyPr/>
-                    <a:lstStyle/>
-                    <a:p>
-                      <a:r>
-                        <a:rPr sz="1300">
-                          <a:solidFill>
-                            <a:srgbClr val="E6EDF3"/>
-                          </a:solidFill>
-                          <a:latin typeface="Segoe UI"/>
-                        </a:rPr>
-                        <a:t>Verifier fights (mechanical)</a:t>
-                      </a:r>
-                    </a:p>
-                  </a:txBody>
-                  <a:tcPr>
-                    <a:solidFill>
-                      <a:srgbClr val="0B0E14"/>
-                    </a:solidFill>
-                  </a:tcPr>
-                </a:tc>
-                <a:tc>
-                  <a:txBody>
-                    <a:bodyPr/>
-                    <a:lstStyle/>
-                    <a:p>
-                      <a:r>
-                        <a:rPr sz="1300">
-                          <a:solidFill>
-                            <a:srgbClr val="E6EDF3"/>
-                          </a:solidFill>
-                          <a:latin typeface="Segoe UI"/>
-                        </a:rPr>
-                        <a:t>~12</a:t>
-                      </a:r>
-                    </a:p>
-                  </a:txBody>
-                  <a:tcPr>
-                    <a:solidFill>
-                      <a:srgbClr val="0B0E14"/>
-                    </a:solidFill>
-                  </a:tcPr>
-                </a:tc>
-                <a:tc>
-                  <a:txBody>
-                    <a:bodyPr/>
-                    <a:lstStyle/>
-                    <a:p>
-                      <a:r>
-                        <a:rPr sz="1300">
-                          <a:solidFill>
-                            <a:srgbClr val="E6EDF3"/>
-                          </a:solidFill>
-                          <a:latin typeface="Segoe UI"/>
-                        </a:rPr>
-                        <a:t>1</a:t>
-                      </a:r>
-                    </a:p>
-                  </a:txBody>
-                  <a:tcPr>
-                    <a:solidFill>
-                      <a:srgbClr val="0B0E14"/>
-                    </a:solidFill>
-                  </a:tcPr>
-                </a:tc>
-              </a:tr>
-            </a:tbl>
-          </a:graphicData>
-        </a:graphic>
-      </p:graphicFrame>
-      <p:sp>
-        <p:nvSpPr>
-          <p:cNvPr id="5" name="TextBox 4"/>
+              <a:t>The Stage 8 upgrade — what's now in the pipeline</a:t>
+            </a:r>
+          </a:p>
+        </p:txBody>
+      </p:sp>
+      <p:sp>
+        <p:nvSpPr>
+          <p:cNvPr id="4" name="TextBox 3"/>
           <p:cNvSpPr txBox="1"/>
           <p:nvPr/>
         </p:nvSpPr>
         <p:spPr>
           <a:xfrm>
-            <a:off x="548640" y="6446520"/>
-            <a:ext cx="10972800" cy="274320"/>
+            <a:off x="640080" y="1554480"/>
+            <a:ext cx="10972800" cy="4572000"/>
           </a:xfrm>
           <a:prstGeom prst="rect">
             <a:avLst/>
@@ -4407,15 +3649,99 @@
           </a:bodyPr>
           <a:lstStyle/>
           <a:p>
-            <a:pPr algn="l"/>
-            <a:r>
-              <a:rPr sz="1000" b="0">
-                <a:solidFill>
-                  <a:srgbClr val="9AA6B2"/>
-                </a:solidFill>
-                <a:latin typeface="Segoe UI"/>
-              </a:rPr>
-              <a:t>Same product, same gates green. Lite trades audit depth for speed.</a:t>
+            <a:pPr algn="l">
+              <a:spcAft>
+                <a:spcPts val="800"/>
+              </a:spcAft>
+            </a:pPr>
+            <a:r>
+              <a:rPr sz="1800">
+                <a:solidFill>
+                  <a:srgbClr val="E6EDF3"/>
+                </a:solidFill>
+                <a:latin typeface="Segoe UI"/>
+              </a:rPr>
+              <a:t>•  Browser tests are required for every user-facing flow on medium/large runs.</a:t>
+            </a:r>
+          </a:p>
+          <a:p>
+            <a:pPr algn="l">
+              <a:spcAft>
+                <a:spcPts val="800"/>
+              </a:spcAft>
+            </a:pPr>
+            <a:r>
+              <a:rPr sz="1800">
+                <a:solidFill>
+                  <a:srgbClr val="E6EDF3"/>
+                </a:solidFill>
+                <a:latin typeface="Segoe UI"/>
+              </a:rPr>
+              <a:t>•  Verifier rejects '.log' as evidence for browser tests — must be screenshot, video, or trace bytes.</a:t>
+            </a:r>
+          </a:p>
+          <a:p>
+            <a:pPr algn="l">
+              <a:spcAft>
+                <a:spcPts val="800"/>
+              </a:spcAft>
+            </a:pPr>
+            <a:r>
+              <a:rPr sz="1800">
+                <a:solidFill>
+                  <a:srgbClr val="E6EDF3"/>
+                </a:solidFill>
+                <a:latin typeface="Segoe UI"/>
+              </a:rPr>
+              <a:t>•  Stage 8 SKILL.md drives Playwright execution explicitly: install if missing, run with --trace on --screenshot on --video retain-on-failure.</a:t>
+            </a:r>
+          </a:p>
+          <a:p>
+            <a:pPr algn="l">
+              <a:spcAft>
+                <a:spcPts val="800"/>
+              </a:spcAft>
+            </a:pPr>
+            <a:r>
+              <a:rPr sz="1800">
+                <a:solidFill>
+                  <a:srgbClr val="E6EDF3"/>
+                </a:solidFill>
+                <a:latin typeface="Segoe UI"/>
+              </a:rPr>
+              <a:t>•  Per-test artifacts go under .agents/artifacts/stage-8/playwright/&lt;test-id&gt;/, mapped to test_plan.json IDs.</a:t>
+            </a:r>
+          </a:p>
+          <a:p>
+            <a:pPr algn="l">
+              <a:spcAft>
+                <a:spcPts val="800"/>
+              </a:spcAft>
+            </a:pPr>
+            <a:r>
+              <a:rPr sz="1800">
+                <a:solidFill>
+                  <a:srgbClr val="E6EDF3"/>
+                </a:solidFill>
+                <a:latin typeface="Segoe UI"/>
+              </a:rPr>
+              <a:t>•  Stage 5 plan template now bakes in playwright.config.ts and one e2e spec per flow as P0 tasks.</a:t>
+            </a:r>
+          </a:p>
+          <a:p>
+            <a:pPr algn="l">
+              <a:spcAft>
+                <a:spcPts val="800"/>
+              </a:spcAft>
+            </a:pPr>
+            <a:r>
+              <a:rPr sz="1800">
+                <a:solidFill>
+                  <a:srgbClr val="E6EDF3"/>
+                </a:solidFill>
+                <a:latin typeface="Segoe UI"/>
+              </a:rPr>
+              <a:t>•  Net: an agent can no longer pass Stage 8 without Playwright actually running and capturing pixels.</a:t>
             </a:r>
           </a:p>
         </p:txBody>
@@ -4511,7 +3837,7 @@
                 </a:solidFill>
                 <a:latin typeface="Segoe UI"/>
               </a:rPr>
-              <a:t>Honest reflection from running both pipelines.</a:t>
+              <a:t>Honest reflection from the end-to-end Snake run.</a:t>
             </a:r>
           </a:p>
         </p:txBody>
@@ -4734,7 +4060,7 @@
                 </a:solidFill>
                 <a:latin typeface="Segoe UI"/>
               </a:rPr>
-              <a:t>•  The lite pipeline got to a working build in roughly 1/3 the time and 1/3 the LOC.</a:t>
+              <a:t>•  Stage 8 weakness was caught in retro and fed straight back into the pipeline definition.</a:t>
             </a:r>
           </a:p>
         </p:txBody>
@@ -5180,7 +4506,7 @@
                 </a:solidFill>
                 <a:latin typeface="Segoe UI"/>
               </a:rPr>
-              <a:t>•  Two near-identical engines exist (full + lite) because greenfield runs in the same session aren't independent.</a:t>
+              <a:t>•  We tried a 3-stage 'lite' pipeline as a counter-experiment; we didn't keep it. Two parallel pipelines split attention and one of them never got browser-tested.</a:t>
             </a:r>
           </a:p>
         </p:txBody>
@@ -5546,7 +4872,7 @@
                 </a:solidFill>
                 <a:latin typeface="Segoe UI"/>
               </a:rPr>
-              <a:t>•  Day 1: read README + STAGE-CONVENTIONS.md. Run /lite-build on a tiny feature. Read every artifact.</a:t>
+              <a:t>•  Day 1: read README + STAGE-CONVENTIONS.md. Run /create-product on a small (medium-size) feature. Stop at every gate.</a:t>
             </a:r>
           </a:p>
           <a:p>
@@ -5562,7 +4888,7 @@
                 </a:solidFill>
                 <a:latin typeface="Segoe UI"/>
               </a:rPr>
-              <a:t>•  Day 2: run /create-product on a small medium-size feature. Stop at each gate. Inspect the verifier output.</a:t>
+              <a:t>•  Day 2: read each generated artifact in order. Trace one FR from goals.json -&gt; components.json -&gt; stories.json -&gt; tasks.json -&gt; the test that covers it.</a:t>
             </a:r>
           </a:p>
           <a:p>
@@ -5579,6 +4905,22 @@
                 <a:latin typeface="Segoe UI"/>
               </a:rPr>
               <a:t>•  Day 3: deliberately break something — change goals.json after stories.json is generated. Run check_drift.py. Watch it catch you.</a:t>
+            </a:r>
+          </a:p>
+          <a:p>
+            <a:pPr algn="l">
+              <a:spcAft>
+                <a:spcPts val="800"/>
+              </a:spcAft>
+            </a:pPr>
+            <a:r>
+              <a:rPr sz="1800">
+                <a:solidFill>
+                  <a:srgbClr val="E6EDF3"/>
+                </a:solidFill>
+                <a:latin typeface="Segoe UI"/>
+              </a:rPr>
+              <a:t>•  Day 4: run a Stage 8 with Playwright. Open the captured screenshots. That's what 'evidence' looks like.</a:t>
             </a:r>
           </a:p>
           <a:p>
@@ -5799,52 +5141,6 @@
                   <a:tcPr>
                     <a:solidFill>
                       <a:srgbClr val="11161F"/>
-                    </a:solidFill>
-                  </a:tcPr>
-                </a:tc>
-              </a:tr>
-              <a:tr h="468629">
-                <a:tc>
-                  <a:txBody>
-                    <a:bodyPr/>
-                    <a:lstStyle/>
-                    <a:p>
-                      <a:r>
-                        <a:rPr sz="1300">
-                          <a:solidFill>
-                            <a:srgbClr val="E6EDF3"/>
-                          </a:solidFill>
-                          <a:latin typeface="Segoe UI"/>
-                        </a:rPr>
-                        <a:t>Build a small feature</a:t>
-                      </a:r>
-                    </a:p>
-                  </a:txBody>
-                  <a:tcPr>
-                    <a:solidFill>
-                      <a:srgbClr val="0B0E14"/>
-                    </a:solidFill>
-                  </a:tcPr>
-                </a:tc>
-                <a:tc>
-                  <a:txBody>
-                    <a:bodyPr/>
-                    <a:lstStyle/>
-                    <a:p>
-                      <a:r>
-                        <a:rPr sz="1300">
-                          <a:solidFill>
-                            <a:srgbClr val="E6EDF3"/>
-                          </a:solidFill>
-                          <a:latin typeface="Segoe UI"/>
-                        </a:rPr>
-                        <a:t>/lite-build &lt;description&gt;</a:t>
-                      </a:r>
-                    </a:p>
-                  </a:txBody>
-                  <a:tcPr>
-                    <a:solidFill>
-                      <a:srgbClr val="0B0E14"/>
                     </a:solidFill>
                   </a:tcPr>
                 </a:tc>
@@ -5930,7 +5226,7 @@
                           </a:solidFill>
                           <a:latin typeface="Segoe UI"/>
                         </a:rPr>
-                        <a:t>/stage-N (full) or python .agents/skills-lite/_verify.py &lt;stage&gt; (lite)</a:t>
+                        <a:t>/stage-N</a:t>
                       </a:r>
                     </a:p>
                   </a:txBody>
@@ -6079,6 +5375,52 @@
                   </a:tcPr>
                 </a:tc>
               </a:tr>
+              <a:tr h="468629">
+                <a:tc>
+                  <a:txBody>
+                    <a:bodyPr/>
+                    <a:lstStyle/>
+                    <a:p>
+                      <a:r>
+                        <a:rPr sz="1300">
+                          <a:solidFill>
+                            <a:srgbClr val="E6EDF3"/>
+                          </a:solidFill>
+                          <a:latin typeface="Segoe UI"/>
+                        </a:rPr>
+                        <a:t>Run Stage 8 browser tests locally</a:t>
+                      </a:r>
+                    </a:p>
+                  </a:txBody>
+                  <a:tcPr>
+                    <a:solidFill>
+                      <a:srgbClr val="0B0E14"/>
+                    </a:solidFill>
+                  </a:tcPr>
+                </a:tc>
+                <a:tc>
+                  <a:txBody>
+                    <a:bodyPr/>
+                    <a:lstStyle/>
+                    <a:p>
+                      <a:r>
+                        <a:rPr sz="1300">
+                          <a:solidFill>
+                            <a:srgbClr val="E6EDF3"/>
+                          </a:solidFill>
+                          <a:latin typeface="Segoe UI"/>
+                        </a:rPr>
+                        <a:t>npx playwright test --trace on --screenshot on</a:t>
+                      </a:r>
+                    </a:p>
+                  </a:txBody>
+                  <a:tcPr>
+                    <a:solidFill>
+                      <a:srgbClr val="0B0E14"/>
+                    </a:solidFill>
+                  </a:tcPr>
+                </a:tc>
+              </a:tr>
               <a:tr h="468636">
                 <a:tc>
                   <a:txBody>
@@ -6267,7 +5609,7 @@
                 </a:solidFill>
                 <a:latin typeface="Segoe UI"/>
               </a:rPr>
-              <a:t>•  Why a structured pipeline (and why we built two of them)</a:t>
+              <a:t>•  Why a structured pipeline</a:t>
             </a:r>
           </a:p>
           <a:p>
@@ -6299,7 +5641,7 @@
                 </a:solidFill>
                 <a:latin typeface="Segoe UI"/>
               </a:rPr>
-              <a:t>•  Stage-by-stage walkthrough</a:t>
+              <a:t>•  Anatomy of a stage skill</a:t>
             </a:r>
           </a:p>
           <a:p>
@@ -6331,7 +5673,7 @@
                 </a:solidFill>
                 <a:latin typeface="Segoe UI"/>
               </a:rPr>
-              <a:t>•  The 3-stage 'lite' pipeline — when full ceremony is overkill</a:t>
+              <a:t>•  The Stage 8 upgrade: real browser-driven UAT</a:t>
             </a:r>
           </a:p>
           <a:p>
@@ -6347,7 +5689,7 @@
                 </a:solidFill>
                 <a:latin typeface="Segoe UI"/>
               </a:rPr>
-              <a:t>•  Side-by-side comparison</a:t>
+              <a:t>•  Retrospective: what went well, what didn't, what we learned</a:t>
             </a:r>
           </a:p>
           <a:p>
@@ -6363,7 +5705,7 @@
                 </a:solidFill>
                 <a:latin typeface="Segoe UI"/>
               </a:rPr>
-              <a:t>•  Retrospective: what went well, what didn't, what we learned</a:t>
+              <a:t>•  What we could do better next</a:t>
             </a:r>
           </a:p>
           <a:p>
